--- a/docs/PromptKit-Intro.pptx
+++ b/docs/PromptKit-Intro.pptx
@@ -4276,7 +4276,7 @@
               </a:defRPr>
             </a:pPr>
             <a:r>
-              <a:t>github.com/microsoft/promptkit  ·  MIT License  ·  v0.2.0</a:t>
+              <a:t>aka.ms/PromptKit  ·  MIT License  ·  v0.2.0</a:t>
             </a:r>
           </a:p>
         </p:txBody>
@@ -11129,7 +11129,7 @@
               </a:defRPr>
             </a:pPr>
             <a:r>
-              <a:t>github.com/microsoft/promptkit</a:t>
+              <a:t>aka.ms/PromptKit</a:t>
             </a:r>
           </a:p>
         </p:txBody>
